--- a/presentations/Imperva_DAM.pptx
+++ b/presentations/Imperva_DAM.pptx
@@ -24878,7 +24878,7 @@
             <a:r>
               <a:rPr lang="en-US" sz="1100" b="1" dirty="0">
                 <a:solidFill>
-                  <a:srgbClr val="DC2626"/>
+                  <a:schemeClr val="bg1"/>
                 </a:solidFill>
                 <a:latin typeface="Calibri" pitchFamily="34" charset="0"/>
                 <a:ea typeface="Calibri" pitchFamily="34" charset="-122"/>
@@ -24886,7 +24886,11 @@
               </a:rPr>
               <a:t>⚠  SQL Injection</a:t>
             </a:r>
-            <a:endParaRPr lang="en-US" sz="1100" dirty="0"/>
+            <a:endParaRPr lang="en-US" sz="1100" dirty="0">
+              <a:solidFill>
+                <a:schemeClr val="bg1"/>
+              </a:solidFill>
+            </a:endParaRPr>
           </a:p>
         </p:txBody>
       </p:sp>
@@ -25052,7 +25056,7 @@
             <a:r>
               <a:rPr lang="en-US" sz="1100" b="1" dirty="0">
                 <a:solidFill>
-                  <a:srgbClr val="DC2626"/>
+                  <a:schemeClr val="bg1"/>
                 </a:solidFill>
                 <a:latin typeface="Calibri" pitchFamily="34" charset="0"/>
                 <a:ea typeface="Calibri" pitchFamily="34" charset="-122"/>
@@ -25060,7 +25064,11 @@
               </a:rPr>
               <a:t>⚠  Privilege Abuse / Insider Threat</a:t>
             </a:r>
-            <a:endParaRPr lang="en-US" sz="1100" dirty="0"/>
+            <a:endParaRPr lang="en-US" sz="1100" dirty="0">
+              <a:solidFill>
+                <a:schemeClr val="bg1"/>
+              </a:solidFill>
+            </a:endParaRPr>
           </a:p>
         </p:txBody>
       </p:sp>
@@ -25226,7 +25234,7 @@
             <a:r>
               <a:rPr lang="en-US" sz="1100" b="1" dirty="0">
                 <a:solidFill>
-                  <a:srgbClr val="DC2626"/>
+                  <a:schemeClr val="bg1"/>
                 </a:solidFill>
                 <a:latin typeface="Calibri" pitchFamily="34" charset="0"/>
                 <a:ea typeface="Calibri" pitchFamily="34" charset="-122"/>
@@ -25234,7 +25242,11 @@
               </a:rPr>
               <a:t>⚠  Encrypted Credentials (Hashed User)</a:t>
             </a:r>
-            <a:endParaRPr lang="en-US" sz="1100" dirty="0"/>
+            <a:endParaRPr lang="en-US" sz="1100" dirty="0">
+              <a:solidFill>
+                <a:schemeClr val="bg1"/>
+              </a:solidFill>
+            </a:endParaRPr>
           </a:p>
         </p:txBody>
       </p:sp>
@@ -25400,7 +25412,7 @@
             <a:r>
               <a:rPr lang="en-US" sz="1100" b="1" dirty="0">
                 <a:solidFill>
-                  <a:srgbClr val="DC2626"/>
+                  <a:schemeClr val="bg1"/>
                 </a:solidFill>
                 <a:latin typeface="Calibri" pitchFamily="34" charset="0"/>
                 <a:ea typeface="Calibri" pitchFamily="34" charset="-122"/>
@@ -25408,7 +25420,11 @@
               </a:rPr>
               <a:t>⚠  Bulk Data Exfiltration</a:t>
             </a:r>
-            <a:endParaRPr lang="en-US" sz="1100" dirty="0"/>
+            <a:endParaRPr lang="en-US" sz="1100" dirty="0">
+              <a:solidFill>
+                <a:schemeClr val="bg1"/>
+              </a:solidFill>
+            </a:endParaRPr>
           </a:p>
         </p:txBody>
       </p:sp>
@@ -25574,7 +25590,7 @@
             <a:r>
               <a:rPr lang="en-US" sz="1100" b="1" dirty="0">
                 <a:solidFill>
-                  <a:srgbClr val="DC2626"/>
+                  <a:schemeClr val="bg1"/>
                 </a:solidFill>
                 <a:latin typeface="Calibri" pitchFamily="34" charset="0"/>
                 <a:ea typeface="Calibri" pitchFamily="34" charset="-122"/>
@@ -25582,7 +25598,11 @@
               </a:rPr>
               <a:t>⚠  Compliance &amp; Audit Gaps</a:t>
             </a:r>
-            <a:endParaRPr lang="en-US" sz="1100" dirty="0"/>
+            <a:endParaRPr lang="en-US" sz="1100" dirty="0">
+              <a:solidFill>
+                <a:schemeClr val="bg1"/>
+              </a:solidFill>
+            </a:endParaRPr>
           </a:p>
         </p:txBody>
       </p:sp>
@@ -25748,7 +25768,7 @@
             <a:r>
               <a:rPr lang="en-US" sz="1100" b="1" dirty="0">
                 <a:solidFill>
-                  <a:srgbClr val="DC2626"/>
+                  <a:schemeClr val="bg1"/>
                 </a:solidFill>
                 <a:latin typeface="Calibri" pitchFamily="34" charset="0"/>
                 <a:ea typeface="Calibri" pitchFamily="34" charset="-122"/>
@@ -25756,7 +25776,11 @@
               </a:rPr>
               <a:t>⚠  Rogue / Shadow Databases</a:t>
             </a:r>
-            <a:endParaRPr lang="en-US" sz="1100" dirty="0"/>
+            <a:endParaRPr lang="en-US" sz="1100" dirty="0">
+              <a:solidFill>
+                <a:schemeClr val="bg1"/>
+              </a:solidFill>
+            </a:endParaRPr>
           </a:p>
         </p:txBody>
       </p:sp>
